--- a/dist/초1/국어/말과글/초1_국어_말과글_03_그림일기쓰기.pptx
+++ b/dist/초1/국어/말과글/초1_국어_말과글_03_그림일기쓰기.pptx
@@ -120,13 +120,13 @@
   <p:extLst>
     <p:ext uri="{521415D9-36F7-43E2-AB2F-B90AF26B5E84}">
       <p14:sectionLst xmlns:p14="http://schemas.microsoft.com/office/powerpoint/2010/main">
-        <p14:section name="도입" id="{5f87ab5c-10bb-ae16-f430-84f0e4050720}">
+        <p14:section name="도입" id="{6252a5f8-5114-a705-4d25-6943557e78cd}">
           <p14:sldIdLst>
             <p14:sldId id="256"/>
             <p14:sldId id="257"/>
           </p14:sldIdLst>
         </p14:section>
-        <p14:section name="개념" id="{f47e5539-f120-3c1c-c43a-31016d3abaa5}">
+        <p14:section name="개념" id="{83a10084-f95f-cd42-7a4a-10ac88dfc23a}">
           <p14:sldIdLst>
             <p14:sldId id="258"/>
             <p14:sldId id="259"/>
@@ -135,25 +135,25 @@
             <p14:sldId id="262"/>
           </p14:sldIdLst>
         </p14:section>
-        <p14:section name="연습" id="{3c63f452-43ad-d5b1-1e7e-86a90d8db0b3}">
+        <p14:section name="연습" id="{d7111e7a-c07a-13e7-c7ec-8be78eb3ba59}">
           <p14:sldIdLst>
             <p14:sldId id="263"/>
             <p14:sldId id="264"/>
           </p14:sldIdLst>
         </p14:section>
-        <p14:section name="확인" id="{02f3d5d1-6359-a38e-d2a8-21c4ed051665}">
+        <p14:section name="확인" id="{8aef6bd7-9e22-33e3-0291-2160e51541e5}">
           <p14:sldIdLst>
             <p14:sldId id="265"/>
             <p14:sldId id="266"/>
             <p14:sldId id="267"/>
           </p14:sldIdLst>
         </p14:section>
-        <p14:section name="정리" id="{153ffb9a-ac06-a6e3-d44d-498c70d09841}">
+        <p14:section name="정리" id="{0aa15943-6ba6-fc51-742a-127c03c733df}">
           <p14:sldIdLst>
             <p14:sldId id="268"/>
           </p14:sldIdLst>
         </p14:section>
-        <p14:section name="보충" id="{07f46507-f8b8-b505-c170-c38a3739eebe}">
+        <p14:section name="보충" id="{47915d08-3d7b-623a-bd60-548456ebd0b0}">
           <p14:sldIdLst>
             <p14:sldId id="269"/>
           </p14:sldIdLst>

--- a/dist/초1/국어/말과글/초1_국어_말과글_03_그림일기쓰기.pptx
+++ b/dist/초1/국어/말과글/초1_국어_말과글_03_그림일기쓰기.pptx
@@ -120,13 +120,13 @@
   <p:extLst>
     <p:ext uri="{521415D9-36F7-43E2-AB2F-B90AF26B5E84}">
       <p14:sectionLst xmlns:p14="http://schemas.microsoft.com/office/powerpoint/2010/main">
-        <p14:section name="도입" id="{6252a5f8-5114-a705-4d25-6943557e78cd}">
+        <p14:section name="도입" id="{15729104-97aa-41a0-661a-66b9a59e1357}">
           <p14:sldIdLst>
             <p14:sldId id="256"/>
             <p14:sldId id="257"/>
           </p14:sldIdLst>
         </p14:section>
-        <p14:section name="개념" id="{83a10084-f95f-cd42-7a4a-10ac88dfc23a}">
+        <p14:section name="개념" id="{de70e0ee-edac-30f5-3f08-09cf9dddfedc}">
           <p14:sldIdLst>
             <p14:sldId id="258"/>
             <p14:sldId id="259"/>
@@ -135,25 +135,25 @@
             <p14:sldId id="262"/>
           </p14:sldIdLst>
         </p14:section>
-        <p14:section name="연습" id="{d7111e7a-c07a-13e7-c7ec-8be78eb3ba59}">
+        <p14:section name="연습" id="{7f09c3c8-45f9-55a8-9d72-427c7074085c}">
           <p14:sldIdLst>
             <p14:sldId id="263"/>
             <p14:sldId id="264"/>
           </p14:sldIdLst>
         </p14:section>
-        <p14:section name="확인" id="{8aef6bd7-9e22-33e3-0291-2160e51541e5}">
+        <p14:section name="확인" id="{3e82994d-b129-fad9-3769-45fae49da5e0}">
           <p14:sldIdLst>
             <p14:sldId id="265"/>
             <p14:sldId id="266"/>
             <p14:sldId id="267"/>
           </p14:sldIdLst>
         </p14:section>
-        <p14:section name="정리" id="{0aa15943-6ba6-fc51-742a-127c03c733df}">
+        <p14:section name="정리" id="{fcabfabb-2bb1-312c-4345-4ed549e1789d}">
           <p14:sldIdLst>
             <p14:sldId id="268"/>
           </p14:sldIdLst>
         </p14:section>
-        <p14:section name="보충" id="{47915d08-3d7b-623a-bd60-548456ebd0b0}">
+        <p14:section name="보충" id="{1c29fedf-7e39-7dff-5af4-a4404e192b74}">
           <p14:sldIdLst>
             <p14:sldId id="269"/>
           </p14:sldIdLst>
